--- a/docs/manuscript/output/SmartSpend_Defense_Slides.pptx
+++ b/docs/manuscript/output/SmartSpend_Defense_Slides.pptx
@@ -3438,7 +3438,7 @@
                 </a:solidFill>
                 <a:latin typeface="Calibri"/>
               </a:rPr>
-              <a:t>Adviser: Janelli M. Mendez, DIT</a:t>
+              <a:t>Adviser: Ellen F. Mangaoang, MIT</a:t>
             </a:r>
           </a:p>
         </p:txBody>
@@ -16796,7 +16796,7 @@
                 </a:solidFill>
                 <a:latin typeface="Calibri"/>
               </a:rPr>
-              <a:t>Adviser: Janelli M. Mendez, DIT</a:t>
+              <a:t>Adviser: Ellen F. Mangaoang, MIT</a:t>
             </a:r>
           </a:p>
         </p:txBody>

--- a/docs/manuscript/output/SmartSpend_Defense_Slides.pptx
+++ b/docs/manuscript/output/SmartSpend_Defense_Slides.pptx
@@ -21,6 +21,7 @@
     <p:sldId id="269" r:id="rId20"/>
     <p:sldId id="270" r:id="rId21"/>
     <p:sldId id="271" r:id="rId22"/>
+    <p:sldId id="272" r:id="rId23"/>
   </p:sldIdLst>
   <p:sldSz cx="12188952" cy="6858000" type="screen4x3"/>
   <p:notesSz cx="6858000" cy="9144000"/>
@@ -3612,7 +3613,7 @@
                 </a:solidFill>
                 <a:latin typeface="Calibri"/>
               </a:rPr>
-              <a:t>10 / 16</a:t>
+              <a:t>10 / 17</a:t>
             </a:r>
           </a:p>
         </p:txBody>
@@ -4287,7 +4288,7 @@
                 </a:solidFill>
                 <a:latin typeface="Calibri"/>
               </a:rPr>
-              <a:t>31 Agentic AI Actions</a:t>
+              <a:t>34 Agentic AI Actions</a:t>
             </a:r>
           </a:p>
         </p:txBody>
@@ -4367,7 +4368,7 @@
                 </a:solidFill>
                 <a:latin typeface="Calibri"/>
               </a:rPr>
-              <a:t>✅ 31</a:t>
+              <a:t>✅ 34</a:t>
             </a:r>
           </a:p>
         </p:txBody>
@@ -8861,7 +8862,7 @@
                 </a:solidFill>
                 <a:latin typeface="Calibri"/>
               </a:rPr>
-              <a:t>11 / 16</a:t>
+              <a:t>11 / 17</a:t>
             </a:r>
           </a:p>
         </p:txBody>
@@ -9934,7 +9935,7 @@
                 </a:solidFill>
                 <a:latin typeface="Calibri"/>
               </a:rPr>
-              <a:t>12 / 16</a:t>
+              <a:t>12 / 17</a:t>
             </a:r>
           </a:p>
         </p:txBody>
@@ -11704,7 +11705,7 @@
                 </a:solidFill>
                 <a:latin typeface="Calibri"/>
               </a:rPr>
-              <a:t>13 / 16</a:t>
+              <a:t>13 / 17</a:t>
             </a:r>
           </a:p>
         </p:txBody>
@@ -14133,7 +14134,7 @@
                 </a:solidFill>
                 <a:latin typeface="Calibri"/>
               </a:rPr>
-              <a:t>14 / 16</a:t>
+              <a:t>14 / 17</a:t>
             </a:r>
           </a:p>
         </p:txBody>
@@ -15865,7 +15866,7 @@
                 </a:solidFill>
                 <a:latin typeface="Calibri"/>
               </a:rPr>
-              <a:t>15 / 16</a:t>
+              <a:t>15 / 17</a:t>
             </a:r>
           </a:p>
         </p:txBody>
@@ -16183,7 +16184,7 @@
                 </a:solidFill>
                 <a:latin typeface="Calibri"/>
               </a:rPr>
-              <a:t>SmartSpend v2.9.10 fully developed: 31 agentic actions, dual-mode FHS, 5-provider failover, 40+ screenshot platforms, all free-tier stack. Gemini 3.1 Flash-Lite confirmed as optimal primary model.</a:t>
+              <a:t>SmartSpend v2.9.19 fully developed: 34 agentic actions, dual-mode FHS, 6-provider failover (incl. LLaMA 4 Scout), 40+ screenshot platforms, all free-tier stack. Gemini 3.1 Flash-Lite confirmed as optimal primary model.</a:t>
             </a:r>
           </a:p>
         </p:txBody>
@@ -16691,7 +16692,7 @@
                 </a:solidFill>
                 <a:latin typeface="Calibri"/>
               </a:rPr>
-              <a:t>SmartSpend — v2.9.10  |  Lucid Frame</a:t>
+              <a:t>SmartSpend — v2.9.11  |  Lucid Frame</a:t>
             </a:r>
           </a:p>
         </p:txBody>
@@ -16867,6 +16868,1128 @@
                 <a:latin typeface="Calibri"/>
               </a:rPr>
               <a:t>Open for Questions</a:t>
+            </a:r>
+          </a:p>
+        </p:txBody>
+      </p:sp>
+    </p:spTree>
+  </p:cSld>
+  <p:clrMapOvr>
+    <a:masterClrMapping/>
+  </p:clrMapOvr>
+</p:sld>
+</file>
+
+<file path=ppt/slides/slide17.xml><?xml version="1.0" encoding="utf-8"?>
+<p:sld xmlns:a="http://schemas.openxmlformats.org/drawingml/2006/main" xmlns:p="http://schemas.openxmlformats.org/presentationml/2006/main" xmlns:r="http://schemas.openxmlformats.org/officeDocument/2006/relationships">
+  <p:cSld>
+    <p:spTree>
+      <p:nvGrpSpPr>
+        <p:cNvPr id="1" name=""/>
+        <p:cNvGrpSpPr/>
+        <p:nvPr/>
+      </p:nvGrpSpPr>
+      <p:grpSpPr/>
+      <p:sp>
+        <p:nvSpPr>
+          <p:cNvPr id="2" name="Rectangle 1"/>
+          <p:cNvSpPr/>
+          <p:nvPr/>
+        </p:nvSpPr>
+        <p:spPr>
+          <a:xfrm>
+            <a:off x="0" y="0"/>
+            <a:ext cx="12188952" cy="914400"/>
+          </a:xfrm>
+          <a:prstGeom prst="rect">
+            <a:avLst/>
+          </a:prstGeom>
+          <a:solidFill>
+            <a:srgbClr val="5C0E24"/>
+          </a:solidFill>
+          <a:ln>
+            <a:noFill/>
+          </a:ln>
+        </p:spPr>
+        <p:style>
+          <a:lnRef idx="1">
+            <a:schemeClr val="accent1"/>
+          </a:lnRef>
+          <a:fillRef idx="3">
+            <a:schemeClr val="accent1"/>
+          </a:fillRef>
+          <a:effectRef idx="2">
+            <a:schemeClr val="accent1"/>
+          </a:effectRef>
+          <a:fontRef idx="minor">
+            <a:schemeClr val="lt1"/>
+          </a:fontRef>
+        </p:style>
+        <p:txBody>
+          <a:bodyPr rtlCol="0" anchor="ctr"/>
+          <a:lstStyle/>
+          <a:p>
+            <a:pPr algn="ctr"/>
+          </a:p>
+        </p:txBody>
+      </p:sp>
+      <p:sp>
+        <p:nvSpPr>
+          <p:cNvPr id="3" name="Rectangle 2"/>
+          <p:cNvSpPr/>
+          <p:nvPr/>
+        </p:nvSpPr>
+        <p:spPr>
+          <a:xfrm>
+            <a:off x="0" y="868680"/>
+            <a:ext cx="12188952" cy="54864"/>
+          </a:xfrm>
+          <a:prstGeom prst="rect">
+            <a:avLst/>
+          </a:prstGeom>
+          <a:solidFill>
+            <a:srgbClr val="C9A84C"/>
+          </a:solidFill>
+          <a:ln>
+            <a:noFill/>
+          </a:ln>
+        </p:spPr>
+        <p:style>
+          <a:lnRef idx="1">
+            <a:schemeClr val="accent1"/>
+          </a:lnRef>
+          <a:fillRef idx="3">
+            <a:schemeClr val="accent1"/>
+          </a:fillRef>
+          <a:effectRef idx="2">
+            <a:schemeClr val="accent1"/>
+          </a:effectRef>
+          <a:fontRef idx="minor">
+            <a:schemeClr val="lt1"/>
+          </a:fontRef>
+        </p:style>
+        <p:txBody>
+          <a:bodyPr rtlCol="0" anchor="ctr"/>
+          <a:lstStyle/>
+          <a:p>
+            <a:pPr algn="ctr"/>
+          </a:p>
+        </p:txBody>
+      </p:sp>
+      <p:sp>
+        <p:nvSpPr>
+          <p:cNvPr id="4" name="TextBox 3"/>
+          <p:cNvSpPr txBox="1"/>
+          <p:nvPr/>
+        </p:nvSpPr>
+        <p:spPr>
+          <a:xfrm>
+            <a:off x="365760" y="109728"/>
+            <a:ext cx="11430000" cy="685800"/>
+          </a:xfrm>
+          <a:prstGeom prst="rect">
+            <a:avLst/>
+          </a:prstGeom>
+          <a:noFill/>
+        </p:spPr>
+        <p:txBody>
+          <a:bodyPr wrap="square">
+            <a:spAutoFit/>
+          </a:bodyPr>
+          <a:lstStyle/>
+          <a:p>
+            <a:pPr algn="l"/>
+            <a:r>
+              <a:rPr sz="3200" b="1" i="0">
+                <a:solidFill>
+                  <a:srgbClr val="FFFFFF"/>
+                </a:solidFill>
+                <a:latin typeface="Calibri"/>
+              </a:rPr>
+              <a:t>Anticipated Q&amp;A — Hot Topics</a:t>
+            </a:r>
+          </a:p>
+        </p:txBody>
+      </p:sp>
+      <p:sp>
+        <p:nvSpPr>
+          <p:cNvPr id="5" name="TextBox 4"/>
+          <p:cNvSpPr txBox="1"/>
+          <p:nvPr/>
+        </p:nvSpPr>
+        <p:spPr>
+          <a:xfrm>
+            <a:off x="11430000" y="6492240"/>
+            <a:ext cx="731520" cy="320040"/>
+          </a:xfrm>
+          <a:prstGeom prst="rect">
+            <a:avLst/>
+          </a:prstGeom>
+          <a:noFill/>
+        </p:spPr>
+        <p:txBody>
+          <a:bodyPr wrap="square">
+            <a:spAutoFit/>
+          </a:bodyPr>
+          <a:lstStyle/>
+          <a:p>
+            <a:pPr algn="r"/>
+            <a:r>
+              <a:rPr sz="1100" b="0" i="0">
+                <a:solidFill>
+                  <a:srgbClr val="555555"/>
+                </a:solidFill>
+                <a:latin typeface="Calibri"/>
+              </a:rPr>
+              <a:t>17 / 17</a:t>
+            </a:r>
+          </a:p>
+        </p:txBody>
+      </p:sp>
+      <p:sp>
+        <p:nvSpPr>
+          <p:cNvPr id="6" name="Rectangle 5"/>
+          <p:cNvSpPr/>
+          <p:nvPr/>
+        </p:nvSpPr>
+        <p:spPr>
+          <a:xfrm>
+            <a:off x="320040" y="1051560"/>
+            <a:ext cx="5715000" cy="1810512"/>
+          </a:xfrm>
+          <a:prstGeom prst="rect">
+            <a:avLst/>
+          </a:prstGeom>
+          <a:solidFill>
+            <a:srgbClr val="EAD9E0"/>
+          </a:solidFill>
+          <a:ln w="19050">
+            <a:solidFill>
+              <a:srgbClr val="BBBBBB"/>
+            </a:solidFill>
+          </a:ln>
+        </p:spPr>
+        <p:style>
+          <a:lnRef idx="1">
+            <a:schemeClr val="accent1"/>
+          </a:lnRef>
+          <a:fillRef idx="3">
+            <a:schemeClr val="accent1"/>
+          </a:fillRef>
+          <a:effectRef idx="2">
+            <a:schemeClr val="accent1"/>
+          </a:effectRef>
+          <a:fontRef idx="minor">
+            <a:schemeClr val="lt1"/>
+          </a:fontRef>
+        </p:style>
+        <p:txBody>
+          <a:bodyPr rtlCol="0" anchor="ctr"/>
+          <a:lstStyle/>
+          <a:p>
+            <a:pPr algn="ctr"/>
+          </a:p>
+        </p:txBody>
+      </p:sp>
+      <p:sp>
+        <p:nvSpPr>
+          <p:cNvPr id="7" name="Rectangle 6"/>
+          <p:cNvSpPr/>
+          <p:nvPr/>
+        </p:nvSpPr>
+        <p:spPr>
+          <a:xfrm>
+            <a:off x="320040" y="1051560"/>
+            <a:ext cx="5715000" cy="384048"/>
+          </a:xfrm>
+          <a:prstGeom prst="rect">
+            <a:avLst/>
+          </a:prstGeom>
+          <a:solidFill>
+            <a:srgbClr val="5C0E24"/>
+          </a:solidFill>
+          <a:ln>
+            <a:noFill/>
+          </a:ln>
+        </p:spPr>
+        <p:style>
+          <a:lnRef idx="1">
+            <a:schemeClr val="accent1"/>
+          </a:lnRef>
+          <a:fillRef idx="3">
+            <a:schemeClr val="accent1"/>
+          </a:fillRef>
+          <a:effectRef idx="2">
+            <a:schemeClr val="accent1"/>
+          </a:effectRef>
+          <a:fontRef idx="minor">
+            <a:schemeClr val="lt1"/>
+          </a:fontRef>
+        </p:style>
+        <p:txBody>
+          <a:bodyPr rtlCol="0" anchor="ctr"/>
+          <a:lstStyle/>
+          <a:p>
+            <a:pPr algn="ctr"/>
+          </a:p>
+        </p:txBody>
+      </p:sp>
+      <p:sp>
+        <p:nvSpPr>
+          <p:cNvPr id="8" name="TextBox 7"/>
+          <p:cNvSpPr txBox="1"/>
+          <p:nvPr/>
+        </p:nvSpPr>
+        <p:spPr>
+          <a:xfrm>
+            <a:off x="429768" y="1088136"/>
+            <a:ext cx="5486400" cy="329184"/>
+          </a:xfrm>
+          <a:prstGeom prst="rect">
+            <a:avLst/>
+          </a:prstGeom>
+          <a:noFill/>
+        </p:spPr>
+        <p:txBody>
+          <a:bodyPr wrap="square">
+            <a:spAutoFit/>
+          </a:bodyPr>
+          <a:lstStyle/>
+          <a:p>
+            <a:pPr algn="l"/>
+            <a:r>
+              <a:rPr sz="1200" b="1" i="0">
+                <a:solidFill>
+                  <a:srgbClr val="FFFFFF"/>
+                </a:solidFill>
+                <a:latin typeface="Calibri"/>
+              </a:rPr>
+              <a:t>Q:  How does the FHS work?</a:t>
+            </a:r>
+          </a:p>
+        </p:txBody>
+      </p:sp>
+      <p:sp>
+        <p:nvSpPr>
+          <p:cNvPr id="9" name="TextBox 8"/>
+          <p:cNvSpPr txBox="1"/>
+          <p:nvPr/>
+        </p:nvSpPr>
+        <p:spPr>
+          <a:xfrm>
+            <a:off x="429768" y="1508760"/>
+            <a:ext cx="5486400" cy="1298448"/>
+          </a:xfrm>
+          <a:prstGeom prst="rect">
+            <a:avLst/>
+          </a:prstGeom>
+          <a:noFill/>
+        </p:spPr>
+        <p:txBody>
+          <a:bodyPr wrap="square">
+            <a:spAutoFit/>
+          </a:bodyPr>
+          <a:lstStyle/>
+          <a:p>
+            <a:pPr algn="l"/>
+            <a:r>
+              <a:rPr sz="1100" b="0" i="0">
+                <a:solidFill>
+                  <a:srgbClr val="222222"/>
+                </a:solidFill>
+                <a:latin typeface="Calibri"/>
+              </a:rPr>
+              <a:t>4 components × 25 pts = 100. Full Mode (income ON): Savings Rate, Overspend Control, Budget Adherence, Logging Consistency. Lightweight (income OFF): Restraint, Consistency, Category Balance, Habit Streak. + Warning Decay (−5/day) &amp; Gap Adjustment.</a:t>
+            </a:r>
+          </a:p>
+        </p:txBody>
+      </p:sp>
+      <p:sp>
+        <p:nvSpPr>
+          <p:cNvPr id="10" name="Rectangle 9"/>
+          <p:cNvSpPr/>
+          <p:nvPr/>
+        </p:nvSpPr>
+        <p:spPr>
+          <a:xfrm>
+            <a:off x="6263640" y="1051560"/>
+            <a:ext cx="5715000" cy="1810512"/>
+          </a:xfrm>
+          <a:prstGeom prst="rect">
+            <a:avLst/>
+          </a:prstGeom>
+          <a:solidFill>
+            <a:srgbClr val="DAE8F5"/>
+          </a:solidFill>
+          <a:ln w="19050">
+            <a:solidFill>
+              <a:srgbClr val="BBBBBB"/>
+            </a:solidFill>
+          </a:ln>
+        </p:spPr>
+        <p:style>
+          <a:lnRef idx="1">
+            <a:schemeClr val="accent1"/>
+          </a:lnRef>
+          <a:fillRef idx="3">
+            <a:schemeClr val="accent1"/>
+          </a:fillRef>
+          <a:effectRef idx="2">
+            <a:schemeClr val="accent1"/>
+          </a:effectRef>
+          <a:fontRef idx="minor">
+            <a:schemeClr val="lt1"/>
+          </a:fontRef>
+        </p:style>
+        <p:txBody>
+          <a:bodyPr rtlCol="0" anchor="ctr"/>
+          <a:lstStyle/>
+          <a:p>
+            <a:pPr algn="ctr"/>
+          </a:p>
+        </p:txBody>
+      </p:sp>
+      <p:sp>
+        <p:nvSpPr>
+          <p:cNvPr id="11" name="Rectangle 10"/>
+          <p:cNvSpPr/>
+          <p:nvPr/>
+        </p:nvSpPr>
+        <p:spPr>
+          <a:xfrm>
+            <a:off x="6263640" y="1051560"/>
+            <a:ext cx="5715000" cy="384048"/>
+          </a:xfrm>
+          <a:prstGeom prst="rect">
+            <a:avLst/>
+          </a:prstGeom>
+          <a:solidFill>
+            <a:srgbClr val="5C0E24"/>
+          </a:solidFill>
+          <a:ln>
+            <a:noFill/>
+          </a:ln>
+        </p:spPr>
+        <p:style>
+          <a:lnRef idx="1">
+            <a:schemeClr val="accent1"/>
+          </a:lnRef>
+          <a:fillRef idx="3">
+            <a:schemeClr val="accent1"/>
+          </a:fillRef>
+          <a:effectRef idx="2">
+            <a:schemeClr val="accent1"/>
+          </a:effectRef>
+          <a:fontRef idx="minor">
+            <a:schemeClr val="lt1"/>
+          </a:fontRef>
+        </p:style>
+        <p:txBody>
+          <a:bodyPr rtlCol="0" anchor="ctr"/>
+          <a:lstStyle/>
+          <a:p>
+            <a:pPr algn="ctr"/>
+          </a:p>
+        </p:txBody>
+      </p:sp>
+      <p:sp>
+        <p:nvSpPr>
+          <p:cNvPr id="12" name="TextBox 11"/>
+          <p:cNvSpPr txBox="1"/>
+          <p:nvPr/>
+        </p:nvSpPr>
+        <p:spPr>
+          <a:xfrm>
+            <a:off x="6373368" y="1088136"/>
+            <a:ext cx="5486400" cy="329184"/>
+          </a:xfrm>
+          <a:prstGeom prst="rect">
+            <a:avLst/>
+          </a:prstGeom>
+          <a:noFill/>
+        </p:spPr>
+        <p:txBody>
+          <a:bodyPr wrap="square">
+            <a:spAutoFit/>
+          </a:bodyPr>
+          <a:lstStyle/>
+          <a:p>
+            <a:pPr algn="l"/>
+            <a:r>
+              <a:rPr sz="1200" b="1" i="0">
+                <a:solidFill>
+                  <a:srgbClr val="FFFFFF"/>
+                </a:solidFill>
+                <a:latin typeface="Calibri"/>
+              </a:rPr>
+              <a:t>Q:  Why Context Injection, not RAG?</a:t>
+            </a:r>
+          </a:p>
+        </p:txBody>
+      </p:sp>
+      <p:sp>
+        <p:nvSpPr>
+          <p:cNvPr id="13" name="TextBox 12"/>
+          <p:cNvSpPr txBox="1"/>
+          <p:nvPr/>
+        </p:nvSpPr>
+        <p:spPr>
+          <a:xfrm>
+            <a:off x="6373368" y="1508760"/>
+            <a:ext cx="5486400" cy="1298448"/>
+          </a:xfrm>
+          <a:prstGeom prst="rect">
+            <a:avLst/>
+          </a:prstGeom>
+          <a:noFill/>
+        </p:spPr>
+        <p:txBody>
+          <a:bodyPr wrap="square">
+            <a:spAutoFit/>
+          </a:bodyPr>
+          <a:lstStyle/>
+          <a:p>
+            <a:pPr algn="l"/>
+            <a:r>
+              <a:rPr sz="1100" b="0" i="0">
+                <a:solidFill>
+                  <a:srgbClr val="222222"/>
+                </a:solidFill>
+                <a:latin typeface="Calibri"/>
+              </a:rPr>
+              <a:t>Per-user data (~5K tokens) fits entirely in one prompt — 50 expenses, 8 budgets, 5 goals. RAG is built for thousands of documents requiring vector search. Our approach is simpler, faster, and appropriate for a mobile single-user workload.</a:t>
+            </a:r>
+          </a:p>
+        </p:txBody>
+      </p:sp>
+      <p:sp>
+        <p:nvSpPr>
+          <p:cNvPr id="14" name="Rectangle 13"/>
+          <p:cNvSpPr/>
+          <p:nvPr/>
+        </p:nvSpPr>
+        <p:spPr>
+          <a:xfrm>
+            <a:off x="320040" y="2953512"/>
+            <a:ext cx="5715000" cy="1810512"/>
+          </a:xfrm>
+          <a:prstGeom prst="rect">
+            <a:avLst/>
+          </a:prstGeom>
+          <a:solidFill>
+            <a:srgbClr val="D9F0DA"/>
+          </a:solidFill>
+          <a:ln w="19050">
+            <a:solidFill>
+              <a:srgbClr val="BBBBBB"/>
+            </a:solidFill>
+          </a:ln>
+        </p:spPr>
+        <p:style>
+          <a:lnRef idx="1">
+            <a:schemeClr val="accent1"/>
+          </a:lnRef>
+          <a:fillRef idx="3">
+            <a:schemeClr val="accent1"/>
+          </a:fillRef>
+          <a:effectRef idx="2">
+            <a:schemeClr val="accent1"/>
+          </a:effectRef>
+          <a:fontRef idx="minor">
+            <a:schemeClr val="lt1"/>
+          </a:fontRef>
+        </p:style>
+        <p:txBody>
+          <a:bodyPr rtlCol="0" anchor="ctr"/>
+          <a:lstStyle/>
+          <a:p>
+            <a:pPr algn="ctr"/>
+          </a:p>
+        </p:txBody>
+      </p:sp>
+      <p:sp>
+        <p:nvSpPr>
+          <p:cNvPr id="15" name="Rectangle 14"/>
+          <p:cNvSpPr/>
+          <p:nvPr/>
+        </p:nvSpPr>
+        <p:spPr>
+          <a:xfrm>
+            <a:off x="320040" y="2953512"/>
+            <a:ext cx="5715000" cy="384048"/>
+          </a:xfrm>
+          <a:prstGeom prst="rect">
+            <a:avLst/>
+          </a:prstGeom>
+          <a:solidFill>
+            <a:srgbClr val="5C0E24"/>
+          </a:solidFill>
+          <a:ln>
+            <a:noFill/>
+          </a:ln>
+        </p:spPr>
+        <p:style>
+          <a:lnRef idx="1">
+            <a:schemeClr val="accent1"/>
+          </a:lnRef>
+          <a:fillRef idx="3">
+            <a:schemeClr val="accent1"/>
+          </a:fillRef>
+          <a:effectRef idx="2">
+            <a:schemeClr val="accent1"/>
+          </a:effectRef>
+          <a:fontRef idx="minor">
+            <a:schemeClr val="lt1"/>
+          </a:fontRef>
+        </p:style>
+        <p:txBody>
+          <a:bodyPr rtlCol="0" anchor="ctr"/>
+          <a:lstStyle/>
+          <a:p>
+            <a:pPr algn="ctr"/>
+          </a:p>
+        </p:txBody>
+      </p:sp>
+      <p:sp>
+        <p:nvSpPr>
+          <p:cNvPr id="16" name="TextBox 15"/>
+          <p:cNvSpPr txBox="1"/>
+          <p:nvPr/>
+        </p:nvSpPr>
+        <p:spPr>
+          <a:xfrm>
+            <a:off x="429768" y="2990088"/>
+            <a:ext cx="5486400" cy="329184"/>
+          </a:xfrm>
+          <a:prstGeom prst="rect">
+            <a:avLst/>
+          </a:prstGeom>
+          <a:noFill/>
+        </p:spPr>
+        <p:txBody>
+          <a:bodyPr wrap="square">
+            <a:spAutoFit/>
+          </a:bodyPr>
+          <a:lstStyle/>
+          <a:p>
+            <a:pPr algn="l"/>
+            <a:r>
+              <a:rPr sz="1200" b="1" i="0">
+                <a:solidFill>
+                  <a:srgbClr val="FFFFFF"/>
+                </a:solidFill>
+                <a:latin typeface="Calibri"/>
+              </a:rPr>
+              <a:t>Q:  What if all 5 AI providers go down?</a:t>
+            </a:r>
+          </a:p>
+        </p:txBody>
+      </p:sp>
+      <p:sp>
+        <p:nvSpPr>
+          <p:cNvPr id="17" name="TextBox 16"/>
+          <p:cNvSpPr txBox="1"/>
+          <p:nvPr/>
+        </p:nvSpPr>
+        <p:spPr>
+          <a:xfrm>
+            <a:off x="429768" y="3410712"/>
+            <a:ext cx="5486400" cy="1298448"/>
+          </a:xfrm>
+          <a:prstGeom prst="rect">
+            <a:avLst/>
+          </a:prstGeom>
+          <a:noFill/>
+        </p:spPr>
+        <p:txBody>
+          <a:bodyPr wrap="square">
+            <a:spAutoFit/>
+          </a:bodyPr>
+          <a:lstStyle/>
+          <a:p>
+            <a:pPr algn="l"/>
+            <a:r>
+              <a:rPr sz="1100" b="0" i="0">
+                <a:solidFill>
+                  <a:srgbClr val="222222"/>
+                </a:solidFill>
+                <a:latin typeface="Calibri"/>
+              </a:rPr>
+              <a:t>App shows a friendly message and stays fully functional — manual expense logging, all analytics, budgets, goals, and FHS work 100% offline. Rate limits reset within minutes (Groq/Cerebras) or at midnight (daily limits). Simultaneous failure across 6 providers is statistically negligible for a 30-respondent study.</a:t>
+            </a:r>
+          </a:p>
+        </p:txBody>
+      </p:sp>
+      <p:sp>
+        <p:nvSpPr>
+          <p:cNvPr id="18" name="Rectangle 17"/>
+          <p:cNvSpPr/>
+          <p:nvPr/>
+        </p:nvSpPr>
+        <p:spPr>
+          <a:xfrm>
+            <a:off x="6263640" y="2953512"/>
+            <a:ext cx="5715000" cy="1810512"/>
+          </a:xfrm>
+          <a:prstGeom prst="rect">
+            <a:avLst/>
+          </a:prstGeom>
+          <a:solidFill>
+            <a:srgbClr val="FFF8DC"/>
+          </a:solidFill>
+          <a:ln w="19050">
+            <a:solidFill>
+              <a:srgbClr val="BBBBBB"/>
+            </a:solidFill>
+          </a:ln>
+        </p:spPr>
+        <p:style>
+          <a:lnRef idx="1">
+            <a:schemeClr val="accent1"/>
+          </a:lnRef>
+          <a:fillRef idx="3">
+            <a:schemeClr val="accent1"/>
+          </a:fillRef>
+          <a:effectRef idx="2">
+            <a:schemeClr val="accent1"/>
+          </a:effectRef>
+          <a:fontRef idx="minor">
+            <a:schemeClr val="lt1"/>
+          </a:fontRef>
+        </p:style>
+        <p:txBody>
+          <a:bodyPr rtlCol="0" anchor="ctr"/>
+          <a:lstStyle/>
+          <a:p>
+            <a:pPr algn="ctr"/>
+          </a:p>
+        </p:txBody>
+      </p:sp>
+      <p:sp>
+        <p:nvSpPr>
+          <p:cNvPr id="19" name="Rectangle 18"/>
+          <p:cNvSpPr/>
+          <p:nvPr/>
+        </p:nvSpPr>
+        <p:spPr>
+          <a:xfrm>
+            <a:off x="6263640" y="2953512"/>
+            <a:ext cx="5715000" cy="384048"/>
+          </a:xfrm>
+          <a:prstGeom prst="rect">
+            <a:avLst/>
+          </a:prstGeom>
+          <a:solidFill>
+            <a:srgbClr val="5C0E24"/>
+          </a:solidFill>
+          <a:ln>
+            <a:noFill/>
+          </a:ln>
+        </p:spPr>
+        <p:style>
+          <a:lnRef idx="1">
+            <a:schemeClr val="accent1"/>
+          </a:lnRef>
+          <a:fillRef idx="3">
+            <a:schemeClr val="accent1"/>
+          </a:fillRef>
+          <a:effectRef idx="2">
+            <a:schemeClr val="accent1"/>
+          </a:effectRef>
+          <a:fontRef idx="minor">
+            <a:schemeClr val="lt1"/>
+          </a:fontRef>
+        </p:style>
+        <p:txBody>
+          <a:bodyPr rtlCol="0" anchor="ctr"/>
+          <a:lstStyle/>
+          <a:p>
+            <a:pPr algn="ctr"/>
+          </a:p>
+        </p:txBody>
+      </p:sp>
+      <p:sp>
+        <p:nvSpPr>
+          <p:cNvPr id="20" name="TextBox 19"/>
+          <p:cNvSpPr txBox="1"/>
+          <p:nvPr/>
+        </p:nvSpPr>
+        <p:spPr>
+          <a:xfrm>
+            <a:off x="6373368" y="2990088"/>
+            <a:ext cx="5486400" cy="329184"/>
+          </a:xfrm>
+          <a:prstGeom prst="rect">
+            <a:avLst/>
+          </a:prstGeom>
+          <a:noFill/>
+        </p:spPr>
+        <p:txBody>
+          <a:bodyPr wrap="square">
+            <a:spAutoFit/>
+          </a:bodyPr>
+          <a:lstStyle/>
+          <a:p>
+            <a:pPr algn="l"/>
+            <a:r>
+              <a:rPr sz="1200" b="1" i="0">
+                <a:solidFill>
+                  <a:srgbClr val="FFFFFF"/>
+                </a:solidFill>
+                <a:latin typeface="Calibri"/>
+              </a:rPr>
+              <a:t>Q:  vs GCash Pera Coach? vs BudgetPH?</a:t>
+            </a:r>
+          </a:p>
+        </p:txBody>
+      </p:sp>
+      <p:sp>
+        <p:nvSpPr>
+          <p:cNvPr id="21" name="TextBox 20"/>
+          <p:cNvSpPr txBox="1"/>
+          <p:nvPr/>
+        </p:nvSpPr>
+        <p:spPr>
+          <a:xfrm>
+            <a:off x="6373368" y="3410712"/>
+            <a:ext cx="5486400" cy="1298448"/>
+          </a:xfrm>
+          <a:prstGeom prst="rect">
+            <a:avLst/>
+          </a:prstGeom>
+          <a:noFill/>
+        </p:spPr>
+        <p:txBody>
+          <a:bodyPr wrap="square">
+            <a:spAutoFit/>
+          </a:bodyPr>
+          <a:lstStyle/>
+          <a:p>
+            <a:pPr algn="l"/>
+            <a:r>
+              <a:rPr sz="1100" b="0" i="0">
+                <a:solidFill>
+                  <a:srgbClr val="222222"/>
+                </a:solidFill>
+                <a:latin typeface="Calibri"/>
+              </a:rPr>
+              <a:t>Pera Coach (March 2026, built with Microsoft): teaches financial literacy via Q&amp;A — no expense tracking, no FHS, no offline, no agentic actions. BudgetPH: closest Filipino competitor — has paluwagan &amp; payday cycles. SmartSpend leads on 34 agentic actions, voice/OCR/barcode, offline-first, gamification.</a:t>
+            </a:r>
+          </a:p>
+        </p:txBody>
+      </p:sp>
+      <p:sp>
+        <p:nvSpPr>
+          <p:cNvPr id="22" name="Rectangle 21"/>
+          <p:cNvSpPr/>
+          <p:nvPr/>
+        </p:nvSpPr>
+        <p:spPr>
+          <a:xfrm>
+            <a:off x="320040" y="4855464"/>
+            <a:ext cx="5715000" cy="1810512"/>
+          </a:xfrm>
+          <a:prstGeom prst="rect">
+            <a:avLst/>
+          </a:prstGeom>
+          <a:solidFill>
+            <a:srgbClr val="F3E5F5"/>
+          </a:solidFill>
+          <a:ln w="19050">
+            <a:solidFill>
+              <a:srgbClr val="BBBBBB"/>
+            </a:solidFill>
+          </a:ln>
+        </p:spPr>
+        <p:style>
+          <a:lnRef idx="1">
+            <a:schemeClr val="accent1"/>
+          </a:lnRef>
+          <a:fillRef idx="3">
+            <a:schemeClr val="accent1"/>
+          </a:fillRef>
+          <a:effectRef idx="2">
+            <a:schemeClr val="accent1"/>
+          </a:effectRef>
+          <a:fontRef idx="minor">
+            <a:schemeClr val="lt1"/>
+          </a:fontRef>
+        </p:style>
+        <p:txBody>
+          <a:bodyPr rtlCol="0" anchor="ctr"/>
+          <a:lstStyle/>
+          <a:p>
+            <a:pPr algn="ctr"/>
+          </a:p>
+        </p:txBody>
+      </p:sp>
+      <p:sp>
+        <p:nvSpPr>
+          <p:cNvPr id="23" name="Rectangle 22"/>
+          <p:cNvSpPr/>
+          <p:nvPr/>
+        </p:nvSpPr>
+        <p:spPr>
+          <a:xfrm>
+            <a:off x="320040" y="4855464"/>
+            <a:ext cx="5715000" cy="384048"/>
+          </a:xfrm>
+          <a:prstGeom prst="rect">
+            <a:avLst/>
+          </a:prstGeom>
+          <a:solidFill>
+            <a:srgbClr val="5C0E24"/>
+          </a:solidFill>
+          <a:ln>
+            <a:noFill/>
+          </a:ln>
+        </p:spPr>
+        <p:style>
+          <a:lnRef idx="1">
+            <a:schemeClr val="accent1"/>
+          </a:lnRef>
+          <a:fillRef idx="3">
+            <a:schemeClr val="accent1"/>
+          </a:fillRef>
+          <a:effectRef idx="2">
+            <a:schemeClr val="accent1"/>
+          </a:effectRef>
+          <a:fontRef idx="minor">
+            <a:schemeClr val="lt1"/>
+          </a:fontRef>
+        </p:style>
+        <p:txBody>
+          <a:bodyPr rtlCol="0" anchor="ctr"/>
+          <a:lstStyle/>
+          <a:p>
+            <a:pPr algn="ctr"/>
+          </a:p>
+        </p:txBody>
+      </p:sp>
+      <p:sp>
+        <p:nvSpPr>
+          <p:cNvPr id="24" name="TextBox 23"/>
+          <p:cNvSpPr txBox="1"/>
+          <p:nvPr/>
+        </p:nvSpPr>
+        <p:spPr>
+          <a:xfrm>
+            <a:off x="429768" y="4892040"/>
+            <a:ext cx="5486400" cy="329184"/>
+          </a:xfrm>
+          <a:prstGeom prst="rect">
+            <a:avLst/>
+          </a:prstGeom>
+          <a:noFill/>
+        </p:spPr>
+        <p:txBody>
+          <a:bodyPr wrap="square">
+            <a:spAutoFit/>
+          </a:bodyPr>
+          <a:lstStyle/>
+          <a:p>
+            <a:pPr algn="l"/>
+            <a:r>
+              <a:rPr sz="1200" b="1" i="0">
+                <a:solidFill>
+                  <a:srgbClr val="FFFFFF"/>
+                </a:solidFill>
+                <a:latin typeface="Calibri"/>
+              </a:rPr>
+              <a:t>Q:  Why only 30 respondents?</a:t>
+            </a:r>
+          </a:p>
+        </p:txBody>
+      </p:sp>
+      <p:sp>
+        <p:nvSpPr>
+          <p:cNvPr id="25" name="TextBox 24"/>
+          <p:cNvSpPr txBox="1"/>
+          <p:nvPr/>
+        </p:nvSpPr>
+        <p:spPr>
+          <a:xfrm>
+            <a:off x="429768" y="5312664"/>
+            <a:ext cx="5486400" cy="1298448"/>
+          </a:xfrm>
+          <a:prstGeom prst="rect">
+            <a:avLst/>
+          </a:prstGeom>
+          <a:noFill/>
+        </p:spPr>
+        <p:txBody>
+          <a:bodyPr wrap="square">
+            <a:spAutoFit/>
+          </a:bodyPr>
+          <a:lstStyle/>
+          <a:p>
+            <a:pPr algn="l"/>
+            <a:r>
+              <a:rPr sz="1100" b="0" i="0">
+                <a:solidFill>
+                  <a:srgbClr val="222222"/>
+                </a:solidFill>
+                <a:latin typeface="Calibri"/>
+              </a:rPr>
+              <a:t>Purposive sampling — academically valid for exploratory capstone studies. Nielsen's Law: 5 users find 85% of usability issues. SUS is validated for small samples (Bangor et al., 2009). Respondents are purposively selected to match the target population: parents 35–55 and young professionals 21–35.</a:t>
+            </a:r>
+          </a:p>
+        </p:txBody>
+      </p:sp>
+      <p:sp>
+        <p:nvSpPr>
+          <p:cNvPr id="26" name="Rectangle 25"/>
+          <p:cNvSpPr/>
+          <p:nvPr/>
+        </p:nvSpPr>
+        <p:spPr>
+          <a:xfrm>
+            <a:off x="6263640" y="4855464"/>
+            <a:ext cx="5715000" cy="1810512"/>
+          </a:xfrm>
+          <a:prstGeom prst="rect">
+            <a:avLst/>
+          </a:prstGeom>
+          <a:solidFill>
+            <a:srgbClr val="FFE8D0"/>
+          </a:solidFill>
+          <a:ln w="19050">
+            <a:solidFill>
+              <a:srgbClr val="BBBBBB"/>
+            </a:solidFill>
+          </a:ln>
+        </p:spPr>
+        <p:style>
+          <a:lnRef idx="1">
+            <a:schemeClr val="accent1"/>
+          </a:lnRef>
+          <a:fillRef idx="3">
+            <a:schemeClr val="accent1"/>
+          </a:fillRef>
+          <a:effectRef idx="2">
+            <a:schemeClr val="accent1"/>
+          </a:effectRef>
+          <a:fontRef idx="minor">
+            <a:schemeClr val="lt1"/>
+          </a:fontRef>
+        </p:style>
+        <p:txBody>
+          <a:bodyPr rtlCol="0" anchor="ctr"/>
+          <a:lstStyle/>
+          <a:p>
+            <a:pPr algn="ctr"/>
+          </a:p>
+        </p:txBody>
+      </p:sp>
+      <p:sp>
+        <p:nvSpPr>
+          <p:cNvPr id="27" name="Rectangle 26"/>
+          <p:cNvSpPr/>
+          <p:nvPr/>
+        </p:nvSpPr>
+        <p:spPr>
+          <a:xfrm>
+            <a:off x="6263640" y="4855464"/>
+            <a:ext cx="5715000" cy="384048"/>
+          </a:xfrm>
+          <a:prstGeom prst="rect">
+            <a:avLst/>
+          </a:prstGeom>
+          <a:solidFill>
+            <a:srgbClr val="5C0E24"/>
+          </a:solidFill>
+          <a:ln>
+            <a:noFill/>
+          </a:ln>
+        </p:spPr>
+        <p:style>
+          <a:lnRef idx="1">
+            <a:schemeClr val="accent1"/>
+          </a:lnRef>
+          <a:fillRef idx="3">
+            <a:schemeClr val="accent1"/>
+          </a:fillRef>
+          <a:effectRef idx="2">
+            <a:schemeClr val="accent1"/>
+          </a:effectRef>
+          <a:fontRef idx="minor">
+            <a:schemeClr val="lt1"/>
+          </a:fontRef>
+        </p:style>
+        <p:txBody>
+          <a:bodyPr rtlCol="0" anchor="ctr"/>
+          <a:lstStyle/>
+          <a:p>
+            <a:pPr algn="ctr"/>
+          </a:p>
+        </p:txBody>
+      </p:sp>
+      <p:sp>
+        <p:nvSpPr>
+          <p:cNvPr id="28" name="TextBox 27"/>
+          <p:cNvSpPr txBox="1"/>
+          <p:nvPr/>
+        </p:nvSpPr>
+        <p:spPr>
+          <a:xfrm>
+            <a:off x="6373368" y="4892040"/>
+            <a:ext cx="5486400" cy="329184"/>
+          </a:xfrm>
+          <a:prstGeom prst="rect">
+            <a:avLst/>
+          </a:prstGeom>
+          <a:noFill/>
+        </p:spPr>
+        <p:txBody>
+          <a:bodyPr wrap="square">
+            <a:spAutoFit/>
+          </a:bodyPr>
+          <a:lstStyle/>
+          <a:p>
+            <a:pPr algn="l"/>
+            <a:r>
+              <a:rPr sz="1200" b="1" i="0">
+                <a:solidFill>
+                  <a:srgbClr val="FFFFFF"/>
+                </a:solidFill>
+                <a:latin typeface="Calibri"/>
+              </a:rPr>
+              <a:t>Q:  Is your data secure?</a:t>
+            </a:r>
+          </a:p>
+        </p:txBody>
+      </p:sp>
+      <p:sp>
+        <p:nvSpPr>
+          <p:cNvPr id="29" name="TextBox 28"/>
+          <p:cNvSpPr txBox="1"/>
+          <p:nvPr/>
+        </p:nvSpPr>
+        <p:spPr>
+          <a:xfrm>
+            <a:off x="6373368" y="5312664"/>
+            <a:ext cx="5486400" cy="1298448"/>
+          </a:xfrm>
+          <a:prstGeom prst="rect">
+            <a:avLst/>
+          </a:prstGeom>
+          <a:noFill/>
+        </p:spPr>
+        <p:txBody>
+          <a:bodyPr wrap="square">
+            <a:spAutoFit/>
+          </a:bodyPr>
+          <a:lstStyle/>
+          <a:p>
+            <a:pPr algn="l"/>
+            <a:r>
+              <a:rPr sz="1100" b="0" i="0">
+                <a:solidFill>
+                  <a:srgbClr val="222222"/>
+                </a:solidFill>
+                <a:latin typeface="Calibri"/>
+              </a:rPr>
+              <a:t>SQLite on-device + Firebase Firestore with UID-scoped security rules. API key fetched via Firebase Remote Config — never hardcoded in the APK binary. App Lock with PIN + biometrics. No PII sent to AI providers — only expense text and anonymized financial summaries.</a:t>
             </a:r>
           </a:p>
         </p:txBody>
@@ -17040,7 +18163,7 @@
                 </a:solidFill>
                 <a:latin typeface="Calibri"/>
               </a:rPr>
-              <a:t>2 / 16</a:t>
+              <a:t>2 / 17</a:t>
             </a:r>
           </a:p>
         </p:txBody>
@@ -17715,7 +18838,7 @@
                 </a:solidFill>
                 <a:latin typeface="Calibri"/>
               </a:rPr>
-              <a:t>3 / 16</a:t>
+              <a:t>3 / 17</a:t>
             </a:r>
           </a:p>
         </p:txBody>
@@ -18468,7 +19591,7 @@
                 </a:solidFill>
                 <a:latin typeface="Calibri"/>
               </a:rPr>
-              <a:t>4 / 16</a:t>
+              <a:t>4 / 17</a:t>
             </a:r>
           </a:p>
         </p:txBody>
@@ -18618,7 +19741,7 @@
                 </a:solidFill>
                 <a:latin typeface="Calibri"/>
               </a:rPr>
-              <a:t>31 Agentic AI
+              <a:t>34 Agentic AI
 Actions</a:t>
             </a:r>
           </a:p>
@@ -19585,7 +20708,7 @@
                 </a:solidFill>
                 <a:latin typeface="Calibri"/>
               </a:rPr>
-              <a:t>5 / 16</a:t>
+              <a:t>5 / 17</a:t>
             </a:r>
           </a:p>
         </p:txBody>
@@ -20659,7 +21782,7 @@
                 </a:solidFill>
                 <a:latin typeface="Calibri"/>
               </a:rPr>
-              <a:t>6 / 16</a:t>
+              <a:t>6 / 17</a:t>
             </a:r>
           </a:p>
         </p:txBody>
@@ -20971,7 +22094,7 @@
                 </a:solidFill>
                 <a:latin typeface="Calibri"/>
               </a:rPr>
-              <a:t>31 Action Types
+              <a:t>34 Action Types
 (Intent Classification)</a:t>
             </a:r>
           </a:p>
@@ -21274,7 +22397,7 @@
                 </a:solidFill>
                 <a:latin typeface="Calibri"/>
               </a:rPr>
-              <a:t>5-Provider Auto-Failover (all free tier):</a:t>
+              <a:t>6-Provider Auto-Failover (all free tier):</a:t>
             </a:r>
           </a:p>
         </p:txBody>
@@ -21287,8 +22410,8 @@
         </p:nvSpPr>
         <p:spPr>
           <a:xfrm>
-            <a:off x="457200" y="3474720"/>
-            <a:ext cx="2103120" cy="1234440"/>
+            <a:off x="201168" y="3474720"/>
+            <a:ext cx="1892807" cy="1234440"/>
           </a:xfrm>
           <a:prstGeom prst="rect">
             <a:avLst/>
@@ -21332,30 +22455,30 @@
         </p:nvSpPr>
         <p:spPr>
           <a:xfrm>
-            <a:off x="457200" y="3493008"/>
-            <a:ext cx="2103120" cy="658368"/>
-          </a:xfrm>
-          <a:prstGeom prst="rect">
-            <a:avLst/>
-          </a:prstGeom>
-          <a:noFill/>
-        </p:spPr>
-        <p:txBody>
-          <a:bodyPr wrap="square">
-            <a:spAutoFit/>
-          </a:bodyPr>
-          <a:lstStyle/>
-          <a:p>
-            <a:pPr algn="ctr"/>
-            <a:r>
-              <a:rPr sz="1300" b="1" i="0">
+            <a:off x="201168" y="3493008"/>
+            <a:ext cx="1892807" cy="658368"/>
+          </a:xfrm>
+          <a:prstGeom prst="rect">
+            <a:avLst/>
+          </a:prstGeom>
+          <a:noFill/>
+        </p:spPr>
+        <p:txBody>
+          <a:bodyPr wrap="square">
+            <a:spAutoFit/>
+          </a:bodyPr>
+          <a:lstStyle/>
+          <a:p>
+            <a:pPr algn="ctr"/>
+            <a:r>
+              <a:rPr sz="1200" b="1" i="0">
                 <a:solidFill>
                   <a:srgbClr val="5C0E24"/>
                 </a:solidFill>
                 <a:latin typeface="Calibri"/>
               </a:rPr>
-              <a:t>1. Gemini 3.1
-Flash-Lite</a:t>
+              <a:t>1. Gemini 3.5
+Flash</a:t>
             </a:r>
           </a:p>
         </p:txBody>
@@ -21368,30 +22491,30 @@
         </p:nvSpPr>
         <p:spPr>
           <a:xfrm>
-            <a:off x="457200" y="4160520"/>
-            <a:ext cx="2103120" cy="502920"/>
-          </a:xfrm>
-          <a:prstGeom prst="rect">
-            <a:avLst/>
-          </a:prstGeom>
-          <a:noFill/>
-        </p:spPr>
-        <p:txBody>
-          <a:bodyPr wrap="square">
-            <a:spAutoFit/>
-          </a:bodyPr>
-          <a:lstStyle/>
-          <a:p>
-            <a:pPr algn="ctr"/>
-            <a:r>
-              <a:rPr sz="1100" b="0" i="0">
+            <a:off x="201168" y="4160520"/>
+            <a:ext cx="1892807" cy="502920"/>
+          </a:xfrm>
+          <a:prstGeom prst="rect">
+            <a:avLst/>
+          </a:prstGeom>
+          <a:noFill/>
+        </p:spPr>
+        <p:txBody>
+          <a:bodyPr wrap="square">
+            <a:spAutoFit/>
+          </a:bodyPr>
+          <a:lstStyle/>
+          <a:p>
+            <a:pPr algn="ctr"/>
+            <a:r>
+              <a:rPr sz="1000" b="0" i="0">
                 <a:solidFill>
                   <a:srgbClr val="2A4A7F"/>
                 </a:solidFill>
                 <a:latin typeface="Calibri"/>
               </a:rPr>
-              <a:t>1,000/day
-(primary)</a:t>
+              <a:t>~1,500/day
+(primary best)</a:t>
             </a:r>
           </a:p>
         </p:txBody>
@@ -21404,8 +22527,8 @@
         </p:nvSpPr>
         <p:spPr>
           <a:xfrm>
-            <a:off x="2788920" y="3474720"/>
-            <a:ext cx="2103120" cy="1234440"/>
+            <a:off x="2194560" y="3474720"/>
+            <a:ext cx="1892807" cy="1234440"/>
           </a:xfrm>
           <a:prstGeom prst="rect">
             <a:avLst/>
@@ -21449,30 +22572,30 @@
         </p:nvSpPr>
         <p:spPr>
           <a:xfrm>
-            <a:off x="2788920" y="3493008"/>
-            <a:ext cx="2103120" cy="658368"/>
-          </a:xfrm>
-          <a:prstGeom prst="rect">
-            <a:avLst/>
-          </a:prstGeom>
-          <a:noFill/>
-        </p:spPr>
-        <p:txBody>
-          <a:bodyPr wrap="square">
-            <a:spAutoFit/>
-          </a:bodyPr>
-          <a:lstStyle/>
-          <a:p>
-            <a:pPr algn="ctr"/>
-            <a:r>
-              <a:rPr sz="1300" b="1" i="0">
+            <a:off x="2194560" y="3493008"/>
+            <a:ext cx="1892807" cy="658368"/>
+          </a:xfrm>
+          <a:prstGeom prst="rect">
+            <a:avLst/>
+          </a:prstGeom>
+          <a:noFill/>
+        </p:spPr>
+        <p:txBody>
+          <a:bodyPr wrap="square">
+            <a:spAutoFit/>
+          </a:bodyPr>
+          <a:lstStyle/>
+          <a:p>
+            <a:pPr algn="ctr"/>
+            <a:r>
+              <a:rPr sz="1200" b="1" i="0">
                 <a:solidFill>
                   <a:srgbClr val="5C0E24"/>
                 </a:solidFill>
                 <a:latin typeface="Calibri"/>
               </a:rPr>
-              <a:t>2. Gemini 3.5
-Flash</a:t>
+              <a:t>2. Gemini 3.1
+Flash-Lite</a:t>
             </a:r>
           </a:p>
         </p:txBody>
@@ -21485,30 +22608,30 @@
         </p:nvSpPr>
         <p:spPr>
           <a:xfrm>
-            <a:off x="2788920" y="4160520"/>
-            <a:ext cx="2103120" cy="502920"/>
-          </a:xfrm>
-          <a:prstGeom prst="rect">
-            <a:avLst/>
-          </a:prstGeom>
-          <a:noFill/>
-        </p:spPr>
-        <p:txBody>
-          <a:bodyPr wrap="square">
-            <a:spAutoFit/>
-          </a:bodyPr>
-          <a:lstStyle/>
-          <a:p>
-            <a:pPr algn="ctr"/>
-            <a:r>
-              <a:rPr sz="1100" b="0" i="0">
+            <a:off x="2194560" y="4160520"/>
+            <a:ext cx="1892807" cy="502920"/>
+          </a:xfrm>
+          <a:prstGeom prst="rect">
+            <a:avLst/>
+          </a:prstGeom>
+          <a:noFill/>
+        </p:spPr>
+        <p:txBody>
+          <a:bodyPr wrap="square">
+            <a:spAutoFit/>
+          </a:bodyPr>
+          <a:lstStyle/>
+          <a:p>
+            <a:pPr algn="ctr"/>
+            <a:r>
+              <a:rPr sz="1000" b="0" i="0">
                 <a:solidFill>
                   <a:srgbClr val="2A4A7F"/>
                 </a:solidFill>
                 <a:latin typeface="Calibri"/>
               </a:rPr>
-              <a:t>250/day
-(fallback 1)</a:t>
+              <a:t>~1,000/day
+(fast Gemini)</a:t>
             </a:r>
           </a:p>
         </p:txBody>
@@ -21521,8 +22644,8 @@
         </p:nvSpPr>
         <p:spPr>
           <a:xfrm>
-            <a:off x="5120640" y="3474720"/>
-            <a:ext cx="2103120" cy="1234440"/>
+            <a:off x="4187952" y="3474720"/>
+            <a:ext cx="1892807" cy="1234440"/>
           </a:xfrm>
           <a:prstGeom prst="rect">
             <a:avLst/>
@@ -21566,30 +22689,30 @@
         </p:nvSpPr>
         <p:spPr>
           <a:xfrm>
-            <a:off x="5120640" y="3493008"/>
-            <a:ext cx="2103120" cy="658368"/>
-          </a:xfrm>
-          <a:prstGeom prst="rect">
-            <a:avLst/>
-          </a:prstGeom>
-          <a:noFill/>
-        </p:spPr>
-        <p:txBody>
-          <a:bodyPr wrap="square">
-            <a:spAutoFit/>
-          </a:bodyPr>
-          <a:lstStyle/>
-          <a:p>
-            <a:pPr algn="ctr"/>
-            <a:r>
-              <a:rPr sz="1300" b="1" i="0">
+            <a:off x="4187952" y="3493008"/>
+            <a:ext cx="1892807" cy="658368"/>
+          </a:xfrm>
+          <a:prstGeom prst="rect">
+            <a:avLst/>
+          </a:prstGeom>
+          <a:noFill/>
+        </p:spPr>
+        <p:txBody>
+          <a:bodyPr wrap="square">
+            <a:spAutoFit/>
+          </a:bodyPr>
+          <a:lstStyle/>
+          <a:p>
+            <a:pPr algn="ctr"/>
+            <a:r>
+              <a:rPr sz="1200" b="1" i="0">
                 <a:solidFill>
                   <a:srgbClr val="5C0E24"/>
                 </a:solidFill>
                 <a:latin typeface="Calibri"/>
               </a:rPr>
-              <a:t>3. Groq LLaMA
-3.3 70B</a:t>
+              <a:t>3. LLaMA 4
+Scout (Groq)</a:t>
             </a:r>
           </a:p>
         </p:txBody>
@@ -21602,30 +22725,30 @@
         </p:nvSpPr>
         <p:spPr>
           <a:xfrm>
-            <a:off x="5120640" y="4160520"/>
-            <a:ext cx="2103120" cy="502920"/>
-          </a:xfrm>
-          <a:prstGeom prst="rect">
-            <a:avLst/>
-          </a:prstGeom>
-          <a:noFill/>
-        </p:spPr>
-        <p:txBody>
-          <a:bodyPr wrap="square">
-            <a:spAutoFit/>
-          </a:bodyPr>
-          <a:lstStyle/>
-          <a:p>
-            <a:pPr algn="ctr"/>
-            <a:r>
-              <a:rPr sz="1100" b="0" i="0">
+            <a:off x="4187952" y="4160520"/>
+            <a:ext cx="1892807" cy="502920"/>
+          </a:xfrm>
+          <a:prstGeom prst="rect">
+            <a:avLst/>
+          </a:prstGeom>
+          <a:noFill/>
+        </p:spPr>
+        <p:txBody>
+          <a:bodyPr wrap="square">
+            <a:spAutoFit/>
+          </a:bodyPr>
+          <a:lstStyle/>
+          <a:p>
+            <a:pPr algn="ctr"/>
+            <a:r>
+              <a:rPr sz="1000" b="0" i="0">
                 <a:solidFill>
                   <a:srgbClr val="2A4A7F"/>
                 </a:solidFill>
                 <a:latin typeface="Calibri"/>
               </a:rPr>
-              <a:t>14,400/day
-(fallback 2)</a:t>
+              <a:t>1,000/day
+(Tagalog native)</a:t>
             </a:r>
           </a:p>
         </p:txBody>
@@ -21638,8 +22761,8 @@
         </p:nvSpPr>
         <p:spPr>
           <a:xfrm>
-            <a:off x="7452359" y="3474720"/>
-            <a:ext cx="2103120" cy="1234440"/>
+            <a:off x="6181344" y="3474720"/>
+            <a:ext cx="1892807" cy="1234440"/>
           </a:xfrm>
           <a:prstGeom prst="rect">
             <a:avLst/>
@@ -21683,30 +22806,30 @@
         </p:nvSpPr>
         <p:spPr>
           <a:xfrm>
-            <a:off x="7452359" y="3493008"/>
-            <a:ext cx="2103120" cy="658368"/>
-          </a:xfrm>
-          <a:prstGeom prst="rect">
-            <a:avLst/>
-          </a:prstGeom>
-          <a:noFill/>
-        </p:spPr>
-        <p:txBody>
-          <a:bodyPr wrap="square">
-            <a:spAutoFit/>
-          </a:bodyPr>
-          <a:lstStyle/>
-          <a:p>
-            <a:pPr algn="ctr"/>
-            <a:r>
-              <a:rPr sz="1300" b="1" i="0">
+            <a:off x="6181344" y="3493008"/>
+            <a:ext cx="1892807" cy="658368"/>
+          </a:xfrm>
+          <a:prstGeom prst="rect">
+            <a:avLst/>
+          </a:prstGeom>
+          <a:noFill/>
+        </p:spPr>
+        <p:txBody>
+          <a:bodyPr wrap="square">
+            <a:spAutoFit/>
+          </a:bodyPr>
+          <a:lstStyle/>
+          <a:p>
+            <a:pPr algn="ctr"/>
+            <a:r>
+              <a:rPr sz="1200" b="1" i="0">
                 <a:solidFill>
                   <a:srgbClr val="5C0E24"/>
                 </a:solidFill>
                 <a:latin typeface="Calibri"/>
               </a:rPr>
-              <a:t>4. Groq LLaMA
-3.1 8B</a:t>
+              <a:t>4. LLaMA 3.3
+70B (Groq)</a:t>
             </a:r>
           </a:p>
         </p:txBody>
@@ -21719,29 +22842,29 @@
         </p:nvSpPr>
         <p:spPr>
           <a:xfrm>
-            <a:off x="7452359" y="4160520"/>
-            <a:ext cx="2103120" cy="502920"/>
-          </a:xfrm>
-          <a:prstGeom prst="rect">
-            <a:avLst/>
-          </a:prstGeom>
-          <a:noFill/>
-        </p:spPr>
-        <p:txBody>
-          <a:bodyPr wrap="square">
-            <a:spAutoFit/>
-          </a:bodyPr>
-          <a:lstStyle/>
-          <a:p>
-            <a:pPr algn="ctr"/>
-            <a:r>
-              <a:rPr sz="1100" b="0" i="0">
+            <a:off x="6181344" y="4160520"/>
+            <a:ext cx="1892807" cy="502920"/>
+          </a:xfrm>
+          <a:prstGeom prst="rect">
+            <a:avLst/>
+          </a:prstGeom>
+          <a:noFill/>
+        </p:spPr>
+        <p:txBody>
+          <a:bodyPr wrap="square">
+            <a:spAutoFit/>
+          </a:bodyPr>
+          <a:lstStyle/>
+          <a:p>
+            <a:pPr algn="ctr"/>
+            <a:r>
+              <a:rPr sz="1000" b="0" i="0">
                 <a:solidFill>
                   <a:srgbClr val="2A4A7F"/>
                 </a:solidFill>
                 <a:latin typeface="Calibri"/>
               </a:rPr>
-              <a:t>14,400/day
+              <a:t>1,000/day
 (fallback 3)</a:t>
             </a:r>
           </a:p>
@@ -21755,8 +22878,8 @@
         </p:nvSpPr>
         <p:spPr>
           <a:xfrm>
-            <a:off x="9784080" y="3474720"/>
-            <a:ext cx="2103120" cy="1234440"/>
+            <a:off x="8174736" y="3474720"/>
+            <a:ext cx="1892807" cy="1234440"/>
           </a:xfrm>
           <a:prstGeom prst="rect">
             <a:avLst/>
@@ -21800,30 +22923,30 @@
         </p:nvSpPr>
         <p:spPr>
           <a:xfrm>
-            <a:off x="9784080" y="3493008"/>
-            <a:ext cx="2103120" cy="658368"/>
-          </a:xfrm>
-          <a:prstGeom prst="rect">
-            <a:avLst/>
-          </a:prstGeom>
-          <a:noFill/>
-        </p:spPr>
-        <p:txBody>
-          <a:bodyPr wrap="square">
-            <a:spAutoFit/>
-          </a:bodyPr>
-          <a:lstStyle/>
-          <a:p>
-            <a:pPr algn="ctr"/>
-            <a:r>
-              <a:rPr sz="1300" b="1" i="0">
+            <a:off x="8174736" y="3493008"/>
+            <a:ext cx="1892807" cy="658368"/>
+          </a:xfrm>
+          <a:prstGeom prst="rect">
+            <a:avLst/>
+          </a:prstGeom>
+          <a:noFill/>
+        </p:spPr>
+        <p:txBody>
+          <a:bodyPr wrap="square">
+            <a:spAutoFit/>
+          </a:bodyPr>
+          <a:lstStyle/>
+          <a:p>
+            <a:pPr algn="ctr"/>
+            <a:r>
+              <a:rPr sz="1200" b="1" i="0">
                 <a:solidFill>
                   <a:srgbClr val="5C0E24"/>
                 </a:solidFill>
                 <a:latin typeface="Calibri"/>
               </a:rPr>
-              <a:t>5. Cerebras
-LLaMA 3.1</a:t>
+              <a:t>5. LLaMA 3.1
+8B (Groq)</a:t>
             </a:r>
           </a:p>
         </p:txBody>
@@ -21836,37 +22959,154 @@
         </p:nvSpPr>
         <p:spPr>
           <a:xfrm>
-            <a:off x="9784080" y="4160520"/>
-            <a:ext cx="2103120" cy="502920"/>
-          </a:xfrm>
-          <a:prstGeom prst="rect">
-            <a:avLst/>
-          </a:prstGeom>
-          <a:noFill/>
-        </p:spPr>
-        <p:txBody>
-          <a:bodyPr wrap="square">
-            <a:spAutoFit/>
-          </a:bodyPr>
-          <a:lstStyle/>
-          <a:p>
-            <a:pPr algn="ctr"/>
-            <a:r>
-              <a:rPr sz="1100" b="0" i="0">
+            <a:off x="8174736" y="4160520"/>
+            <a:ext cx="1892807" cy="502920"/>
+          </a:xfrm>
+          <a:prstGeom prst="rect">
+            <a:avLst/>
+          </a:prstGeom>
+          <a:noFill/>
+        </p:spPr>
+        <p:txBody>
+          <a:bodyPr wrap="square">
+            <a:spAutoFit/>
+          </a:bodyPr>
+          <a:lstStyle/>
+          <a:p>
+            <a:pPr algn="ctr"/>
+            <a:r>
+              <a:rPr sz="1000" b="0" i="0">
                 <a:solidFill>
                   <a:srgbClr val="2A4A7F"/>
                 </a:solidFill>
                 <a:latin typeface="Calibri"/>
               </a:rPr>
+              <a:t>14,400/day
+(fast/volume)</a:t>
+            </a:r>
+          </a:p>
+        </p:txBody>
+      </p:sp>
+      <p:sp>
+        <p:nvSpPr>
+          <p:cNvPr id="37" name="Rectangle 36"/>
+          <p:cNvSpPr/>
+          <p:nvPr/>
+        </p:nvSpPr>
+        <p:spPr>
+          <a:xfrm>
+            <a:off x="10168128" y="3474720"/>
+            <a:ext cx="1892807" cy="1234440"/>
+          </a:xfrm>
+          <a:prstGeom prst="rect">
+            <a:avLst/>
+          </a:prstGeom>
+          <a:solidFill>
+            <a:srgbClr val="FFE8D0"/>
+          </a:solidFill>
+          <a:ln w="19050">
+            <a:solidFill>
+              <a:srgbClr val="CCCCCC"/>
+            </a:solidFill>
+          </a:ln>
+        </p:spPr>
+        <p:style>
+          <a:lnRef idx="1">
+            <a:schemeClr val="accent1"/>
+          </a:lnRef>
+          <a:fillRef idx="3">
+            <a:schemeClr val="accent1"/>
+          </a:fillRef>
+          <a:effectRef idx="2">
+            <a:schemeClr val="accent1"/>
+          </a:effectRef>
+          <a:fontRef idx="minor">
+            <a:schemeClr val="lt1"/>
+          </a:fontRef>
+        </p:style>
+        <p:txBody>
+          <a:bodyPr rtlCol="0" anchor="ctr"/>
+          <a:lstStyle/>
+          <a:p>
+            <a:pPr algn="ctr"/>
+          </a:p>
+        </p:txBody>
+      </p:sp>
+      <p:sp>
+        <p:nvSpPr>
+          <p:cNvPr id="38" name="TextBox 37"/>
+          <p:cNvSpPr txBox="1"/>
+          <p:nvPr/>
+        </p:nvSpPr>
+        <p:spPr>
+          <a:xfrm>
+            <a:off x="10168128" y="3493008"/>
+            <a:ext cx="1892807" cy="658368"/>
+          </a:xfrm>
+          <a:prstGeom prst="rect">
+            <a:avLst/>
+          </a:prstGeom>
+          <a:noFill/>
+        </p:spPr>
+        <p:txBody>
+          <a:bodyPr wrap="square">
+            <a:spAutoFit/>
+          </a:bodyPr>
+          <a:lstStyle/>
+          <a:p>
+            <a:pPr algn="ctr"/>
+            <a:r>
+              <a:rPr sz="1200" b="1" i="0">
+                <a:solidFill>
+                  <a:srgbClr val="5C0E24"/>
+                </a:solidFill>
+                <a:latin typeface="Calibri"/>
+              </a:rPr>
+              <a:t>6. GPT-OSS
+120B (Cerebras)</a:t>
+            </a:r>
+          </a:p>
+        </p:txBody>
+      </p:sp>
+      <p:sp>
+        <p:nvSpPr>
+          <p:cNvPr id="39" name="TextBox 38"/>
+          <p:cNvSpPr txBox="1"/>
+          <p:nvPr/>
+        </p:nvSpPr>
+        <p:spPr>
+          <a:xfrm>
+            <a:off x="10168128" y="4160520"/>
+            <a:ext cx="1892807" cy="502920"/>
+          </a:xfrm>
+          <a:prstGeom prst="rect">
+            <a:avLst/>
+          </a:prstGeom>
+          <a:noFill/>
+        </p:spPr>
+        <p:txBody>
+          <a:bodyPr wrap="square">
+            <a:spAutoFit/>
+          </a:bodyPr>
+          <a:lstStyle/>
+          <a:p>
+            <a:pPr algn="ctr"/>
+            <a:r>
+              <a:rPr sz="1000" b="0" i="0">
+                <a:solidFill>
+                  <a:srgbClr val="2A4A7F"/>
+                </a:solidFill>
+                <a:latin typeface="Calibri"/>
+              </a:rPr>
               <a:t>1M tokens/day
-(fallback 4)</a:t>
-            </a:r>
-          </a:p>
-        </p:txBody>
-      </p:sp>
-      <p:sp>
-        <p:nvSpPr>
-          <p:cNvPr id="37" name="Rectangle 36"/>
+(last resort)</a:t>
+            </a:r>
+          </a:p>
+        </p:txBody>
+      </p:sp>
+      <p:sp>
+        <p:nvSpPr>
+          <p:cNvPr id="40" name="Rectangle 39"/>
           <p:cNvSpPr/>
           <p:nvPr/>
         </p:nvSpPr>
@@ -21911,7 +23151,7 @@
       </p:sp>
       <p:sp>
         <p:nvSpPr>
-          <p:cNvPr id="38" name="TextBox 37"/>
+          <p:cNvPr id="41" name="TextBox 40"/>
           <p:cNvSpPr txBox="1"/>
           <p:nvPr/>
         </p:nvSpPr>
@@ -22113,7 +23353,7 @@
                 </a:solidFill>
                 <a:latin typeface="Calibri"/>
               </a:rPr>
-              <a:t>7 / 16</a:t>
+              <a:t>7 / 17</a:t>
             </a:r>
           </a:p>
         </p:txBody>
@@ -26183,7 +27423,7 @@
                 </a:solidFill>
                 <a:latin typeface="Calibri"/>
               </a:rPr>
-              <a:t>8 / 16</a:t>
+              <a:t>8 / 17</a:t>
             </a:r>
           </a:p>
         </p:txBody>
@@ -26784,7 +28024,7 @@
                 <a:latin typeface="Calibri"/>
               </a:rPr>
               <a:t>Agentic JSON
-Output (31 actions)</a:t>
+Output (34 actions)</a:t>
             </a:r>
           </a:p>
         </p:txBody>
@@ -27685,7 +28925,7 @@
                 </a:solidFill>
                 <a:latin typeface="Calibri"/>
               </a:rPr>
-              <a:t>9 / 16</a:t>
+              <a:t>9 / 17</a:t>
             </a:r>
           </a:p>
         </p:txBody>
